--- a/docs/apresentacoes/Bonanca_Dados_que_Viram_Decisao.pptx
+++ b/docs/apresentacoes/Bonanca_Dados_que_Viram_Decisao.pptx
@@ -1478,12 +1478,17 @@
         </p:nvSpPr>
         <p:spPr>
           <a:xfrm>
-            <a:off x="1371600" y="7137400"/>
-            <a:ext cx="13589000" cy="9144"/>
-          </a:xfrm>
-          <a:prstGeom prst="line">
-            <a:avLst/>
-          </a:prstGeom>
+            <a:off x="1371600" y="6273800"/>
+            <a:ext cx="2032000" cy="406400"/>
+          </a:xfrm>
+          <a:prstGeom prst="rect">
+            <a:avLst/>
+          </a:prstGeom>
+          <a:solidFill>
+            <a:srgbClr val="F9F7F1">
+              <a:alpha val="8000"/>
+            </a:srgbClr>
+          </a:solidFill>
           <a:ln w="12700">
             <a:solidFill>
               <a:srgbClr val="F9F7F1">
@@ -1502,6 +1507,205 @@
         </p:nvSpPr>
         <p:spPr>
           <a:xfrm>
+            <a:off x="1524000" y="6388100"/>
+            <a:ext cx="1727200" cy="177800"/>
+          </a:xfrm>
+          <a:prstGeom prst="rect">
+            <a:avLst/>
+          </a:prstGeom>
+          <a:noFill/>
+          <a:ln/>
+        </p:spPr>
+        <p:txBody>
+          <a:bodyPr wrap="none" lIns="0" tIns="0" rIns="0" bIns="0" rtlCol="0" anchor="t"/>
+          <a:lstStyle/>
+          <a:p>
+            <a:pPr algn="ctr" indent="0" marL="0">
+              <a:buNone/>
+            </a:pPr>
+            <a:r>
+              <a:rPr lang="en-US" altLang="en-US" sz="1200" dirty="0">
+                <a:solidFill>
+                  <a:srgbClr val="F9F7F1"/>
+                </a:solidFill>
+                <a:latin typeface="Inter" pitchFamily="34" charset="0"/>
+                <a:ea typeface="Inter" pitchFamily="34" charset="-122"/>
+                <a:cs typeface="Inter" pitchFamily="34" charset="-120"/>
+              </a:rPr>
+              <a:t>ORGANIZAR</a:t>
+            </a:r>
+            <a:endParaRPr lang="en-US" sz="1200" dirty="0"/>
+          </a:p>
+        </p:txBody>
+      </p:sp>
+      <p:sp>
+        <p:nvSpPr>
+          <p:cNvPr id="8" name="capa-shape-7"/>
+          <p:cNvSpPr/>
+          <p:nvPr/>
+        </p:nvSpPr>
+        <p:spPr>
+          <a:xfrm>
+            <a:off x="3556000" y="6273800"/>
+            <a:ext cx="2032000" cy="406400"/>
+          </a:xfrm>
+          <a:prstGeom prst="rect">
+            <a:avLst/>
+          </a:prstGeom>
+          <a:solidFill>
+            <a:srgbClr val="F9F7F1">
+              <a:alpha val="8000"/>
+            </a:srgbClr>
+          </a:solidFill>
+          <a:ln w="12700">
+            <a:solidFill>
+              <a:srgbClr val="F9F7F1">
+                <a:alpha val="50000"/>
+              </a:srgbClr>
+            </a:solidFill>
+            <a:prstDash val="solid"/>
+          </a:ln>
+        </p:spPr>
+      </p:sp>
+      <p:sp>
+        <p:nvSpPr>
+          <p:cNvPr id="9" name="capa-text-8"/>
+          <p:cNvSpPr/>
+          <p:nvPr/>
+        </p:nvSpPr>
+        <p:spPr>
+          <a:xfrm>
+            <a:off x="3708400" y="6388100"/>
+            <a:ext cx="1727200" cy="177800"/>
+          </a:xfrm>
+          <a:prstGeom prst="rect">
+            <a:avLst/>
+          </a:prstGeom>
+          <a:noFill/>
+          <a:ln/>
+        </p:spPr>
+        <p:txBody>
+          <a:bodyPr wrap="none" lIns="0" tIns="0" rIns="0" bIns="0" rtlCol="0" anchor="t"/>
+          <a:lstStyle/>
+          <a:p>
+            <a:pPr algn="ctr" indent="0" marL="0">
+              <a:buNone/>
+            </a:pPr>
+            <a:r>
+              <a:rPr lang="en-US" altLang="en-US" sz="1200" dirty="0">
+                <a:solidFill>
+                  <a:srgbClr val="F9F7F1"/>
+                </a:solidFill>
+                <a:latin typeface="Inter" pitchFamily="34" charset="0"/>
+                <a:ea typeface="Inter" pitchFamily="34" charset="-122"/>
+                <a:cs typeface="Inter" pitchFamily="34" charset="-120"/>
+              </a:rPr>
+              <a:t>VALIDAR</a:t>
+            </a:r>
+            <a:endParaRPr lang="en-US" sz="1200" dirty="0"/>
+          </a:p>
+        </p:txBody>
+      </p:sp>
+      <p:sp>
+        <p:nvSpPr>
+          <p:cNvPr id="10" name="capa-shape-9"/>
+          <p:cNvSpPr/>
+          <p:nvPr/>
+        </p:nvSpPr>
+        <p:spPr>
+          <a:xfrm>
+            <a:off x="5740400" y="6273800"/>
+            <a:ext cx="2032000" cy="406400"/>
+          </a:xfrm>
+          <a:prstGeom prst="rect">
+            <a:avLst/>
+          </a:prstGeom>
+          <a:solidFill>
+            <a:srgbClr val="F9F7F1">
+              <a:alpha val="8000"/>
+            </a:srgbClr>
+          </a:solidFill>
+          <a:ln w="12700">
+            <a:solidFill>
+              <a:srgbClr val="F9F7F1">
+                <a:alpha val="50000"/>
+              </a:srgbClr>
+            </a:solidFill>
+            <a:prstDash val="solid"/>
+          </a:ln>
+        </p:spPr>
+      </p:sp>
+      <p:sp>
+        <p:nvSpPr>
+          <p:cNvPr id="11" name="capa-text-10"/>
+          <p:cNvSpPr/>
+          <p:nvPr/>
+        </p:nvSpPr>
+        <p:spPr>
+          <a:xfrm>
+            <a:off x="5892800" y="6388100"/>
+            <a:ext cx="1727200" cy="177800"/>
+          </a:xfrm>
+          <a:prstGeom prst="rect">
+            <a:avLst/>
+          </a:prstGeom>
+          <a:noFill/>
+          <a:ln/>
+        </p:spPr>
+        <p:txBody>
+          <a:bodyPr wrap="none" lIns="0" tIns="0" rIns="0" bIns="0" rtlCol="0" anchor="t"/>
+          <a:lstStyle/>
+          <a:p>
+            <a:pPr algn="ctr" indent="0" marL="0">
+              <a:buNone/>
+            </a:pPr>
+            <a:r>
+              <a:rPr lang="en-US" altLang="en-US" sz="1200" dirty="0">
+                <a:solidFill>
+                  <a:srgbClr val="F9F7F1"/>
+                </a:solidFill>
+                <a:latin typeface="Inter" pitchFamily="34" charset="0"/>
+                <a:ea typeface="Inter" pitchFamily="34" charset="-122"/>
+                <a:cs typeface="Inter" pitchFamily="34" charset="-120"/>
+              </a:rPr>
+              <a:t>DECIDIR</a:t>
+            </a:r>
+            <a:endParaRPr lang="en-US" sz="1200" dirty="0"/>
+          </a:p>
+        </p:txBody>
+      </p:sp>
+      <p:sp>
+        <p:nvSpPr>
+          <p:cNvPr id="12" name="capa-shape-11"/>
+          <p:cNvSpPr/>
+          <p:nvPr/>
+        </p:nvSpPr>
+        <p:spPr>
+          <a:xfrm>
+            <a:off x="1371600" y="7137400"/>
+            <a:ext cx="13589000" cy="9144"/>
+          </a:xfrm>
+          <a:prstGeom prst="line">
+            <a:avLst/>
+          </a:prstGeom>
+          <a:ln w="12700">
+            <a:solidFill>
+              <a:srgbClr val="F9F7F1">
+                <a:alpha val="50000"/>
+              </a:srgbClr>
+            </a:solidFill>
+            <a:prstDash val="solid"/>
+          </a:ln>
+        </p:spPr>
+      </p:sp>
+      <p:sp>
+        <p:nvSpPr>
+          <p:cNvPr id="13" name="capa-text-12"/>
+          <p:cNvSpPr/>
+          <p:nvPr/>
+        </p:nvSpPr>
+        <p:spPr>
+          <a:xfrm>
             <a:off x="1371600" y="7493000"/>
             <a:ext cx="9652000" cy="330200"/>
           </a:xfrm>
@@ -1533,9 +1737,48 @@
           </a:p>
         </p:txBody>
       </p:sp>
+      <p:sp>
+        <p:nvSpPr>
+          <p:cNvPr id="14" name="capa-text-13"/>
+          <p:cNvSpPr/>
+          <p:nvPr/>
+        </p:nvSpPr>
+        <p:spPr>
+          <a:xfrm>
+            <a:off x="11938000" y="7493000"/>
+            <a:ext cx="2717800" cy="330200"/>
+          </a:xfrm>
+          <a:prstGeom prst="rect">
+            <a:avLst/>
+          </a:prstGeom>
+          <a:noFill/>
+          <a:ln/>
+        </p:spPr>
+        <p:txBody>
+          <a:bodyPr wrap="square" lIns="0" tIns="0" rIns="0" bIns="0" rtlCol="0" anchor="t"/>
+          <a:lstStyle/>
+          <a:p>
+            <a:pPr algn="r" indent="0" marL="0">
+              <a:buNone/>
+            </a:pPr>
+            <a:r>
+              <a:rPr lang="en-US" altLang="en-US" sz="1600" dirty="0">
+                <a:solidFill>
+                  <a:srgbClr val="F9F7F1"/>
+                </a:solidFill>
+                <a:latin typeface="Inter" pitchFamily="34" charset="0"/>
+                <a:ea typeface="Inter" pitchFamily="34" charset="-122"/>
+                <a:cs typeface="Inter" pitchFamily="34" charset="-120"/>
+              </a:rPr>
+              <a:t>BONANÇA DATA CORE</a:t>
+            </a:r>
+            <a:endParaRPr lang="en-US" sz="1600" dirty="0"/>
+          </a:p>
+        </p:txBody>
+      </p:sp>
       <p:pic>
         <p:nvPicPr>
-          <p:cNvPr id="8" name="capa-icon-7" descr="preencoded.png">    </p:cNvPr>
+          <p:cNvPr id="15" name="capa-icon-14" descr="preencoded.png">    </p:cNvPr>
           <p:cNvPicPr>
             <a:picLocks noChangeAspect="1"/>
           </p:cNvPicPr>
@@ -1561,7 +1804,7 @@
       </p:pic>
       <p:pic>
         <p:nvPicPr>
-          <p:cNvPr id="9" name="capa-icon-8" descr="preencoded.png">    </p:cNvPr>
+          <p:cNvPr id="16" name="capa-icon-15" descr="preencoded.png">    </p:cNvPr>
           <p:cNvPicPr>
             <a:picLocks noChangeAspect="1"/>
           </p:cNvPicPr>
@@ -1717,7 +1960,85 @@
       </p:sp>
       <p:sp>
         <p:nvSpPr>
-          <p:cNvPr id="5" name="desafio-shape-4"/>
+          <p:cNvPr id="5" name="desafio-text-4"/>
+          <p:cNvSpPr/>
+          <p:nvPr/>
+        </p:nvSpPr>
+        <p:spPr>
+          <a:xfrm>
+            <a:off x="1066800" y="2794000"/>
+            <a:ext cx="2286000" cy="203200"/>
+          </a:xfrm>
+          <a:prstGeom prst="rect">
+            <a:avLst/>
+          </a:prstGeom>
+          <a:noFill/>
+          <a:ln/>
+        </p:spPr>
+        <p:txBody>
+          <a:bodyPr wrap="none" lIns="0" tIns="0" rIns="0" bIns="0" rtlCol="0" anchor="t"/>
+          <a:lstStyle/>
+          <a:p>
+            <a:pPr algn="l" indent="0" marL="0">
+              <a:buNone/>
+            </a:pPr>
+            <a:r>
+              <a:rPr lang="en-US" altLang="en-US" sz="1200" dirty="0">
+                <a:solidFill>
+                  <a:srgbClr val="C05746"/>
+                </a:solidFill>
+                <a:latin typeface="Inter" pitchFamily="34" charset="0"/>
+                <a:ea typeface="Inter" pitchFamily="34" charset="-122"/>
+                <a:cs typeface="Inter" pitchFamily="34" charset="-120"/>
+              </a:rPr>
+              <a:t>ANTES: ATRITO OPERACIONAL</a:t>
+            </a:r>
+            <a:endParaRPr lang="en-US" sz="1200" dirty="0"/>
+          </a:p>
+        </p:txBody>
+      </p:sp>
+      <p:sp>
+        <p:nvSpPr>
+          <p:cNvPr id="6" name="desafio-text-5"/>
+          <p:cNvSpPr/>
+          <p:nvPr/>
+        </p:nvSpPr>
+        <p:spPr>
+          <a:xfrm>
+            <a:off x="9779000" y="2794000"/>
+            <a:ext cx="2286000" cy="203200"/>
+          </a:xfrm>
+          <a:prstGeom prst="rect">
+            <a:avLst/>
+          </a:prstGeom>
+          <a:noFill/>
+          <a:ln/>
+        </p:spPr>
+        <p:txBody>
+          <a:bodyPr wrap="none" lIns="0" tIns="0" rIns="0" bIns="0" rtlCol="0" anchor="t"/>
+          <a:lstStyle/>
+          <a:p>
+            <a:pPr algn="l" indent="0" marL="0">
+              <a:buNone/>
+            </a:pPr>
+            <a:r>
+              <a:rPr lang="en-US" altLang="en-US" sz="1200" dirty="0">
+                <a:solidFill>
+                  <a:srgbClr val="1A4B3C"/>
+                </a:solidFill>
+                <a:latin typeface="Inter" pitchFamily="34" charset="0"/>
+                <a:ea typeface="Inter" pitchFamily="34" charset="-122"/>
+                <a:cs typeface="Inter" pitchFamily="34" charset="-120"/>
+              </a:rPr>
+              <a:t>DEPOIS: BASE CONFIÁVEL</a:t>
+            </a:r>
+            <a:endParaRPr lang="en-US" sz="1200" dirty="0"/>
+          </a:p>
+        </p:txBody>
+      </p:sp>
+      <p:sp>
+        <p:nvSpPr>
+          <p:cNvPr id="7" name="desafio-shape-6"/>
           <p:cNvSpPr/>
           <p:nvPr/>
         </p:nvSpPr>
@@ -1742,7 +2063,7 @@
       </p:sp>
       <p:pic>
         <p:nvPicPr>
-          <p:cNvPr id="6" name="desafio-icon-5" descr="preencoded.png">    </p:cNvPr>
+          <p:cNvPr id="8" name="desafio-icon-7" descr="preencoded.png">    </p:cNvPr>
           <p:cNvPicPr>
             <a:picLocks noChangeAspect="1"/>
           </p:cNvPicPr>
@@ -1766,7 +2087,7 @@
       </p:pic>
       <p:sp>
         <p:nvSpPr>
-          <p:cNvPr id="7" name="desafio-text-6"/>
+          <p:cNvPr id="9" name="desafio-text-8"/>
           <p:cNvSpPr/>
           <p:nvPr/>
         </p:nvSpPr>
@@ -1805,7 +2126,7 @@
       </p:sp>
       <p:sp>
         <p:nvSpPr>
-          <p:cNvPr id="8" name="desafio-shape-7"/>
+          <p:cNvPr id="10" name="desafio-shape-9"/>
           <p:cNvSpPr/>
           <p:nvPr/>
         </p:nvSpPr>
@@ -1830,7 +2151,7 @@
       </p:sp>
       <p:pic>
         <p:nvPicPr>
-          <p:cNvPr id="9" name="desafio-icon-8" descr="preencoded.png">    </p:cNvPr>
+          <p:cNvPr id="11" name="desafio-icon-10" descr="preencoded.png">    </p:cNvPr>
           <p:cNvPicPr>
             <a:picLocks noChangeAspect="1"/>
           </p:cNvPicPr>
@@ -1854,7 +2175,7 @@
       </p:pic>
       <p:sp>
         <p:nvSpPr>
-          <p:cNvPr id="10" name="desafio-text-9"/>
+          <p:cNvPr id="12" name="desafio-text-11"/>
           <p:cNvSpPr/>
           <p:nvPr/>
         </p:nvSpPr>
@@ -1893,7 +2214,7 @@
       </p:sp>
       <p:sp>
         <p:nvSpPr>
-          <p:cNvPr id="11" name="desafio-shape-10"/>
+          <p:cNvPr id="13" name="desafio-shape-12"/>
           <p:cNvSpPr/>
           <p:nvPr/>
         </p:nvSpPr>
@@ -1918,7 +2239,7 @@
       </p:sp>
       <p:pic>
         <p:nvPicPr>
-          <p:cNvPr id="12" name="desafio-icon-11" descr="preencoded.png">    </p:cNvPr>
+          <p:cNvPr id="14" name="desafio-icon-13" descr="preencoded.png">    </p:cNvPr>
           <p:cNvPicPr>
             <a:picLocks noChangeAspect="1"/>
           </p:cNvPicPr>
@@ -1942,7 +2263,7 @@
       </p:pic>
       <p:sp>
         <p:nvSpPr>
-          <p:cNvPr id="13" name="desafio-text-12"/>
+          <p:cNvPr id="15" name="desafio-text-14"/>
           <p:cNvSpPr/>
           <p:nvPr/>
         </p:nvSpPr>
@@ -1981,7 +2302,7 @@
       </p:sp>
       <p:sp>
         <p:nvSpPr>
-          <p:cNvPr id="14" name="desafio-shape-13"/>
+          <p:cNvPr id="16" name="desafio-shape-15"/>
           <p:cNvSpPr/>
           <p:nvPr/>
         </p:nvSpPr>
@@ -2004,7 +2325,46 @@
       </p:sp>
       <p:sp>
         <p:nvSpPr>
-          <p:cNvPr id="15" name="desafio-shape-14"/>
+          <p:cNvPr id="17" name="desafio-text-16"/>
+          <p:cNvSpPr/>
+          <p:nvPr/>
+        </p:nvSpPr>
+        <p:spPr>
+          <a:xfrm>
+            <a:off x="7912100" y="4673600"/>
+            <a:ext cx="1193800" cy="203200"/>
+          </a:xfrm>
+          <a:prstGeom prst="rect">
+            <a:avLst/>
+          </a:prstGeom>
+          <a:noFill/>
+          <a:ln/>
+        </p:spPr>
+        <p:txBody>
+          <a:bodyPr wrap="none" lIns="0" tIns="0" rIns="0" bIns="0" rtlCol="0" anchor="t"/>
+          <a:lstStyle/>
+          <a:p>
+            <a:pPr algn="ctr" indent="0" marL="0">
+              <a:buNone/>
+            </a:pPr>
+            <a:r>
+              <a:rPr lang="en-US" altLang="en-US" sz="1100" dirty="0">
+                <a:solidFill>
+                  <a:srgbClr val="1D5C63"/>
+                </a:solidFill>
+                <a:latin typeface="Inter" pitchFamily="34" charset="0"/>
+                <a:ea typeface="Inter" pitchFamily="34" charset="-122"/>
+                <a:cs typeface="Inter" pitchFamily="34" charset="-120"/>
+              </a:rPr>
+              <a:t>ORGANIZAR</a:t>
+            </a:r>
+            <a:endParaRPr lang="en-US" sz="1100" dirty="0"/>
+          </a:p>
+        </p:txBody>
+      </p:sp>
+      <p:sp>
+        <p:nvSpPr>
+          <p:cNvPr id="18" name="desafio-shape-17"/>
           <p:cNvSpPr/>
           <p:nvPr/>
         </p:nvSpPr>
@@ -2024,7 +2384,7 @@
       </p:sp>
       <p:pic>
         <p:nvPicPr>
-          <p:cNvPr id="16" name="desafio-icon-15" descr="preencoded.png">    </p:cNvPr>
+          <p:cNvPr id="19" name="desafio-icon-18" descr="preencoded.png">    </p:cNvPr>
           <p:cNvPicPr>
             <a:picLocks noChangeAspect="1"/>
           </p:cNvPicPr>
@@ -2048,7 +2408,7 @@
       </p:pic>
       <p:sp>
         <p:nvSpPr>
-          <p:cNvPr id="17" name="desafio-text-16"/>
+          <p:cNvPr id="20" name="desafio-text-19"/>
           <p:cNvSpPr/>
           <p:nvPr/>
         </p:nvSpPr>
@@ -2104,7 +2464,7 @@
       </p:sp>
       <p:sp>
         <p:nvSpPr>
-          <p:cNvPr id="18" name="desafio-text-17"/>
+          <p:cNvPr id="21" name="desafio-text-20"/>
           <p:cNvSpPr/>
           <p:nvPr/>
         </p:nvSpPr>
@@ -2177,7 +2537,7 @@
       </p:sp>
       <p:sp>
         <p:nvSpPr>
-          <p:cNvPr id="19" name="desafio-text-18"/>
+          <p:cNvPr id="22" name="desafio-text-21"/>
           <p:cNvSpPr/>
           <p:nvPr/>
         </p:nvSpPr>
@@ -2369,9 +2729,48 @@
           </a:ln>
         </p:spPr>
       </p:sp>
+      <p:sp>
+        <p:nvSpPr>
+          <p:cNvPr id="6" name="solucao-text-5"/>
+          <p:cNvSpPr/>
+          <p:nvPr/>
+        </p:nvSpPr>
+        <p:spPr>
+          <a:xfrm>
+            <a:off x="4572000" y="3505200"/>
+            <a:ext cx="431800" cy="279400"/>
+          </a:xfrm>
+          <a:prstGeom prst="rect">
+            <a:avLst/>
+          </a:prstGeom>
+          <a:noFill/>
+          <a:ln/>
+        </p:spPr>
+        <p:txBody>
+          <a:bodyPr wrap="none" lIns="0" tIns="0" rIns="0" bIns="0" rtlCol="0" anchor="t"/>
+          <a:lstStyle/>
+          <a:p>
+            <a:pPr algn="r" indent="0" marL="0">
+              <a:buNone/>
+            </a:pPr>
+            <a:r>
+              <a:rPr lang="en-US" altLang="en-US" sz="1500" dirty="0">
+                <a:solidFill>
+                  <a:srgbClr val="1D5C63"/>
+                </a:solidFill>
+                <a:latin typeface="Inter" pitchFamily="34" charset="0"/>
+                <a:ea typeface="Inter" pitchFamily="34" charset="-122"/>
+                <a:cs typeface="Inter" pitchFamily="34" charset="-120"/>
+              </a:rPr>
+              <a:t>01</a:t>
+            </a:r>
+            <a:endParaRPr lang="en-US" sz="1500" dirty="0"/>
+          </a:p>
+        </p:txBody>
+      </p:sp>
       <p:pic>
         <p:nvPicPr>
-          <p:cNvPr id="6" name="solucao-icon-5" descr="preencoded.png">    </p:cNvPr>
+          <p:cNvPr id="7" name="solucao-icon-6" descr="preencoded.png">    </p:cNvPr>
           <p:cNvPicPr>
             <a:picLocks noChangeAspect="1"/>
           </p:cNvPicPr>
@@ -2395,7 +2794,7 @@
       </p:pic>
       <p:sp>
         <p:nvSpPr>
-          <p:cNvPr id="7" name="solucao-text-6"/>
+          <p:cNvPr id="8" name="solucao-text-7"/>
           <p:cNvSpPr/>
           <p:nvPr/>
         </p:nvSpPr>
@@ -2434,7 +2833,7 @@
       </p:sp>
       <p:sp>
         <p:nvSpPr>
-          <p:cNvPr id="8" name="solucao-text-7"/>
+          <p:cNvPr id="9" name="solucao-text-8"/>
           <p:cNvSpPr/>
           <p:nvPr/>
         </p:nvSpPr>
@@ -2473,7 +2872,7 @@
       </p:sp>
       <p:sp>
         <p:nvSpPr>
-          <p:cNvPr id="9" name="solucao-shape-8"/>
+          <p:cNvPr id="10" name="solucao-shape-9"/>
           <p:cNvSpPr/>
           <p:nvPr/>
         </p:nvSpPr>
@@ -2496,9 +2895,48 @@
           </a:ln>
         </p:spPr>
       </p:sp>
+      <p:sp>
+        <p:nvSpPr>
+          <p:cNvPr id="11" name="solucao-text-10"/>
+          <p:cNvSpPr/>
+          <p:nvPr/>
+        </p:nvSpPr>
+        <p:spPr>
+          <a:xfrm>
+            <a:off x="9474200" y="3505200"/>
+            <a:ext cx="431800" cy="279400"/>
+          </a:xfrm>
+          <a:prstGeom prst="rect">
+            <a:avLst/>
+          </a:prstGeom>
+          <a:noFill/>
+          <a:ln/>
+        </p:spPr>
+        <p:txBody>
+          <a:bodyPr wrap="none" lIns="0" tIns="0" rIns="0" bIns="0" rtlCol="0" anchor="t"/>
+          <a:lstStyle/>
+          <a:p>
+            <a:pPr algn="r" indent="0" marL="0">
+              <a:buNone/>
+            </a:pPr>
+            <a:r>
+              <a:rPr lang="en-US" altLang="en-US" sz="1500" dirty="0">
+                <a:solidFill>
+                  <a:srgbClr val="1D5C63"/>
+                </a:solidFill>
+                <a:latin typeface="Inter" pitchFamily="34" charset="0"/>
+                <a:ea typeface="Inter" pitchFamily="34" charset="-122"/>
+                <a:cs typeface="Inter" pitchFamily="34" charset="-120"/>
+              </a:rPr>
+              <a:t>02</a:t>
+            </a:r>
+            <a:endParaRPr lang="en-US" sz="1500" dirty="0"/>
+          </a:p>
+        </p:txBody>
+      </p:sp>
       <p:pic>
         <p:nvPicPr>
-          <p:cNvPr id="10" name="solucao-icon-9" descr="preencoded.png">    </p:cNvPr>
+          <p:cNvPr id="12" name="solucao-icon-11" descr="preencoded.png">    </p:cNvPr>
           <p:cNvPicPr>
             <a:picLocks noChangeAspect="1"/>
           </p:cNvPicPr>
@@ -2522,7 +2960,7 @@
       </p:pic>
       <p:sp>
         <p:nvSpPr>
-          <p:cNvPr id="11" name="solucao-text-10"/>
+          <p:cNvPr id="13" name="solucao-text-12"/>
           <p:cNvSpPr/>
           <p:nvPr/>
         </p:nvSpPr>
@@ -2561,7 +2999,7 @@
       </p:sp>
       <p:sp>
         <p:nvSpPr>
-          <p:cNvPr id="12" name="solucao-text-11"/>
+          <p:cNvPr id="14" name="solucao-text-13"/>
           <p:cNvSpPr/>
           <p:nvPr/>
         </p:nvSpPr>
@@ -2600,7 +3038,7 @@
       </p:sp>
       <p:sp>
         <p:nvSpPr>
-          <p:cNvPr id="13" name="solucao-shape-12"/>
+          <p:cNvPr id="15" name="solucao-shape-14"/>
           <p:cNvSpPr/>
           <p:nvPr/>
         </p:nvSpPr>
@@ -2623,9 +3061,48 @@
           </a:ln>
         </p:spPr>
       </p:sp>
+      <p:sp>
+        <p:nvSpPr>
+          <p:cNvPr id="16" name="solucao-text-15"/>
+          <p:cNvSpPr/>
+          <p:nvPr/>
+        </p:nvSpPr>
+        <p:spPr>
+          <a:xfrm>
+            <a:off x="14376400" y="3505200"/>
+            <a:ext cx="431800" cy="279400"/>
+          </a:xfrm>
+          <a:prstGeom prst="rect">
+            <a:avLst/>
+          </a:prstGeom>
+          <a:noFill/>
+          <a:ln/>
+        </p:spPr>
+        <p:txBody>
+          <a:bodyPr wrap="none" lIns="0" tIns="0" rIns="0" bIns="0" rtlCol="0" anchor="t"/>
+          <a:lstStyle/>
+          <a:p>
+            <a:pPr algn="r" indent="0" marL="0">
+              <a:buNone/>
+            </a:pPr>
+            <a:r>
+              <a:rPr lang="en-US" altLang="en-US" sz="1500" dirty="0">
+                <a:solidFill>
+                  <a:srgbClr val="1D5C63"/>
+                </a:solidFill>
+                <a:latin typeface="Inter" pitchFamily="34" charset="0"/>
+                <a:ea typeface="Inter" pitchFamily="34" charset="-122"/>
+                <a:cs typeface="Inter" pitchFamily="34" charset="-120"/>
+              </a:rPr>
+              <a:t>03</a:t>
+            </a:r>
+            <a:endParaRPr lang="en-US" sz="1500" dirty="0"/>
+          </a:p>
+        </p:txBody>
+      </p:sp>
       <p:pic>
         <p:nvPicPr>
-          <p:cNvPr id="14" name="solucao-icon-13" descr="preencoded.png">    </p:cNvPr>
+          <p:cNvPr id="17" name="solucao-icon-16" descr="preencoded.png">    </p:cNvPr>
           <p:cNvPicPr>
             <a:picLocks noChangeAspect="1"/>
           </p:cNvPicPr>
@@ -2649,7 +3126,7 @@
       </p:pic>
       <p:sp>
         <p:nvSpPr>
-          <p:cNvPr id="15" name="solucao-text-14"/>
+          <p:cNvPr id="18" name="solucao-text-17"/>
           <p:cNvSpPr/>
           <p:nvPr/>
         </p:nvSpPr>
@@ -2688,7 +3165,7 @@
       </p:sp>
       <p:sp>
         <p:nvSpPr>
-          <p:cNvPr id="16" name="solucao-text-15"/>
+          <p:cNvPr id="19" name="solucao-text-18"/>
           <p:cNvSpPr/>
           <p:nvPr/>
         </p:nvSpPr>
@@ -2727,7 +3204,68 @@
       </p:sp>
       <p:sp>
         <p:nvSpPr>
-          <p:cNvPr id="17" name="solucao-text-16"/>
+          <p:cNvPr id="20" name="solucao-shape-19"/>
+          <p:cNvSpPr/>
+          <p:nvPr/>
+        </p:nvSpPr>
+        <p:spPr>
+          <a:xfrm>
+            <a:off x="3225800" y="7366000"/>
+            <a:ext cx="9804400" cy="9144"/>
+          </a:xfrm>
+          <a:prstGeom prst="line">
+            <a:avLst/>
+          </a:prstGeom>
+          <a:ln w="25400">
+            <a:solidFill>
+              <a:srgbClr val="1D5C63"/>
+            </a:solidFill>
+            <a:prstDash val="solid"/>
+          </a:ln>
+        </p:spPr>
+      </p:sp>
+      <p:sp>
+        <p:nvSpPr>
+          <p:cNvPr id="21" name="solucao-text-20"/>
+          <p:cNvSpPr/>
+          <p:nvPr/>
+        </p:nvSpPr>
+        <p:spPr>
+          <a:xfrm>
+            <a:off x="3225800" y="7556500"/>
+            <a:ext cx="9804400" cy="228600"/>
+          </a:xfrm>
+          <a:prstGeom prst="rect">
+            <a:avLst/>
+          </a:prstGeom>
+          <a:noFill/>
+          <a:ln/>
+        </p:spPr>
+        <p:txBody>
+          <a:bodyPr wrap="square" lIns="0" tIns="0" rIns="0" bIns="0" rtlCol="0" anchor="t"/>
+          <a:lstStyle/>
+          <a:p>
+            <a:pPr algn="ctr" indent="0" marL="0">
+              <a:buNone/>
+            </a:pPr>
+            <a:r>
+              <a:rPr lang="en-US" altLang="en-US" sz="1200" dirty="0">
+                <a:solidFill>
+                  <a:srgbClr val="76746D"/>
+                </a:solidFill>
+                <a:latin typeface="Inter" pitchFamily="34" charset="0"/>
+                <a:ea typeface="Inter" pitchFamily="34" charset="-122"/>
+                <a:cs typeface="Inter" pitchFamily="34" charset="-120"/>
+              </a:rPr>
+              <a:t>UMA ÚNICA ROTINA PARA A OPERAÇÃO E A GESTÃO</a:t>
+            </a:r>
+            <a:endParaRPr lang="en-US" sz="1200" dirty="0"/>
+          </a:p>
+        </p:txBody>
+      </p:sp>
+      <p:sp>
+        <p:nvSpPr>
+          <p:cNvPr id="22" name="solucao-text-21"/>
           <p:cNvSpPr/>
           <p:nvPr/>
         </p:nvSpPr>
@@ -2902,6 +3440,65 @@
         </p:nvSpPr>
         <p:spPr>
           <a:xfrm>
+            <a:off x="1066800" y="2857500"/>
+            <a:ext cx="2260600" cy="381000"/>
+          </a:xfrm>
+          <a:prstGeom prst="rect">
+            <a:avLst/>
+          </a:prstGeom>
+          <a:solidFill>
+            <a:srgbClr val="1A4B3C"/>
+          </a:solidFill>
+          <a:ln/>
+        </p:spPr>
+      </p:sp>
+      <p:sp>
+        <p:nvSpPr>
+          <p:cNvPr id="6" name="importacao-text-5"/>
+          <p:cNvSpPr/>
+          <p:nvPr/>
+        </p:nvSpPr>
+        <p:spPr>
+          <a:xfrm>
+            <a:off x="1219200" y="2971800"/>
+            <a:ext cx="1955800" cy="152400"/>
+          </a:xfrm>
+          <a:prstGeom prst="rect">
+            <a:avLst/>
+          </a:prstGeom>
+          <a:noFill/>
+          <a:ln/>
+        </p:spPr>
+        <p:txBody>
+          <a:bodyPr wrap="none" lIns="0" tIns="0" rIns="0" bIns="0" rtlCol="0" anchor="t"/>
+          <a:lstStyle/>
+          <a:p>
+            <a:pPr algn="ctr" indent="0" marL="0">
+              <a:buNone/>
+            </a:pPr>
+            <a:r>
+              <a:rPr lang="en-US" altLang="en-US" sz="1100" dirty="0">
+                <a:solidFill>
+                  <a:srgbClr val="F9F7F1"/>
+                </a:solidFill>
+                <a:latin typeface="Inter" pitchFamily="34" charset="0"/>
+                <a:ea typeface="Inter" pitchFamily="34" charset="-122"/>
+                <a:cs typeface="Inter" pitchFamily="34" charset="-120"/>
+              </a:rPr>
+              <a:t>MODELO EXCEL OFICIAL</a:t>
+            </a:r>
+            <a:endParaRPr lang="en-US" sz="1100" dirty="0"/>
+          </a:p>
+        </p:txBody>
+      </p:sp>
+      <p:sp>
+        <p:nvSpPr>
+          <p:cNvPr id="7" name="importacao-shape-6"/>
+          <p:cNvSpPr/>
+          <p:nvPr/>
+        </p:nvSpPr>
+        <p:spPr>
+          <a:xfrm>
             <a:off x="1066800" y="3683000"/>
             <a:ext cx="2895600" cy="2235200"/>
           </a:xfrm>
@@ -2916,7 +3513,7 @@
       </p:sp>
       <p:pic>
         <p:nvPicPr>
-          <p:cNvPr id="6" name="importacao-icon-5" descr="preencoded.png">    </p:cNvPr>
+          <p:cNvPr id="8" name="importacao-icon-7" descr="preencoded.png">    </p:cNvPr>
           <p:cNvPicPr>
             <a:picLocks noChangeAspect="1"/>
           </p:cNvPicPr>
@@ -2940,7 +3537,7 @@
       </p:pic>
       <p:sp>
         <p:nvSpPr>
-          <p:cNvPr id="7" name="importacao-text-6"/>
+          <p:cNvPr id="9" name="importacao-text-8"/>
           <p:cNvSpPr/>
           <p:nvPr/>
         </p:nvSpPr>
@@ -2996,7 +3593,7 @@
       </p:sp>
       <p:sp>
         <p:nvSpPr>
-          <p:cNvPr id="8" name="importacao-shape-7"/>
+          <p:cNvPr id="10" name="importacao-shape-9"/>
           <p:cNvSpPr/>
           <p:nvPr/>
         </p:nvSpPr>
@@ -3019,7 +3616,7 @@
       </p:sp>
       <p:sp>
         <p:nvSpPr>
-          <p:cNvPr id="9" name="importacao-shape-8"/>
+          <p:cNvPr id="11" name="importacao-shape-10"/>
           <p:cNvSpPr/>
           <p:nvPr/>
         </p:nvSpPr>
@@ -3039,7 +3636,7 @@
       </p:sp>
       <p:pic>
         <p:nvPicPr>
-          <p:cNvPr id="10" name="importacao-icon-9" descr="preencoded.png">    </p:cNvPr>
+          <p:cNvPr id="12" name="importacao-icon-11" descr="preencoded.png">    </p:cNvPr>
           <p:cNvPicPr>
             <a:picLocks noChangeAspect="1"/>
           </p:cNvPicPr>
@@ -3063,7 +3660,7 @@
       </p:pic>
       <p:sp>
         <p:nvSpPr>
-          <p:cNvPr id="11" name="importacao-text-10"/>
+          <p:cNvPr id="13" name="importacao-text-12"/>
           <p:cNvSpPr/>
           <p:nvPr/>
         </p:nvSpPr>
@@ -3119,7 +3716,7 @@
       </p:sp>
       <p:sp>
         <p:nvSpPr>
-          <p:cNvPr id="12" name="importacao-shape-11"/>
+          <p:cNvPr id="14" name="importacao-shape-13"/>
           <p:cNvSpPr/>
           <p:nvPr/>
         </p:nvSpPr>
@@ -3142,7 +3739,7 @@
       </p:sp>
       <p:sp>
         <p:nvSpPr>
-          <p:cNvPr id="13" name="importacao-shape-12"/>
+          <p:cNvPr id="15" name="importacao-shape-14"/>
           <p:cNvSpPr/>
           <p:nvPr/>
         </p:nvSpPr>
@@ -3162,7 +3759,7 @@
       </p:sp>
       <p:pic>
         <p:nvPicPr>
-          <p:cNvPr id="14" name="importacao-icon-13" descr="preencoded.png">    </p:cNvPr>
+          <p:cNvPr id="16" name="importacao-icon-15" descr="preencoded.png">    </p:cNvPr>
           <p:cNvPicPr>
             <a:picLocks noChangeAspect="1"/>
           </p:cNvPicPr>
@@ -3186,7 +3783,7 @@
       </p:pic>
       <p:sp>
         <p:nvSpPr>
-          <p:cNvPr id="15" name="importacao-text-14"/>
+          <p:cNvPr id="17" name="importacao-text-16"/>
           <p:cNvSpPr/>
           <p:nvPr/>
         </p:nvSpPr>
@@ -3242,7 +3839,7 @@
       </p:sp>
       <p:sp>
         <p:nvSpPr>
-          <p:cNvPr id="16" name="importacao-shape-15"/>
+          <p:cNvPr id="18" name="importacao-shape-17"/>
           <p:cNvSpPr/>
           <p:nvPr/>
         </p:nvSpPr>
@@ -3265,7 +3862,7 @@
       </p:sp>
       <p:sp>
         <p:nvSpPr>
-          <p:cNvPr id="17" name="importacao-shape-16"/>
+          <p:cNvPr id="19" name="importacao-shape-18"/>
           <p:cNvSpPr/>
           <p:nvPr/>
         </p:nvSpPr>
@@ -3285,7 +3882,7 @@
       </p:sp>
       <p:pic>
         <p:nvPicPr>
-          <p:cNvPr id="18" name="importacao-icon-17" descr="preencoded.png">    </p:cNvPr>
+          <p:cNvPr id="20" name="importacao-icon-19" descr="preencoded.png">    </p:cNvPr>
           <p:cNvPicPr>
             <a:picLocks noChangeAspect="1"/>
           </p:cNvPicPr>
@@ -3309,7 +3906,7 @@
       </p:pic>
       <p:sp>
         <p:nvSpPr>
-          <p:cNvPr id="19" name="importacao-text-18"/>
+          <p:cNvPr id="21" name="importacao-text-20"/>
           <p:cNvSpPr/>
           <p:nvPr/>
         </p:nvSpPr>
@@ -3365,7 +3962,46 @@
       </p:sp>
       <p:sp>
         <p:nvSpPr>
-          <p:cNvPr id="20" name="importacao-shape-19"/>
+          <p:cNvPr id="22" name="importacao-text-21"/>
+          <p:cNvSpPr/>
+          <p:nvPr/>
+        </p:nvSpPr>
+        <p:spPr>
+          <a:xfrm>
+            <a:off x="11849100" y="6096000"/>
+            <a:ext cx="2895600" cy="203200"/>
+          </a:xfrm>
+          <a:prstGeom prst="rect">
+            <a:avLst/>
+          </a:prstGeom>
+          <a:noFill/>
+          <a:ln/>
+        </p:spPr>
+        <p:txBody>
+          <a:bodyPr wrap="none" lIns="0" tIns="0" rIns="0" bIns="0" rtlCol="0" anchor="t"/>
+          <a:lstStyle/>
+          <a:p>
+            <a:pPr algn="ctr" indent="0" marL="0">
+              <a:buNone/>
+            </a:pPr>
+            <a:r>
+              <a:rPr lang="en-US" altLang="en-US" sz="1100" dirty="0">
+                <a:solidFill>
+                  <a:srgbClr val="1A4B3C"/>
+                </a:solidFill>
+                <a:latin typeface="Inter" pitchFamily="34" charset="0"/>
+                <a:ea typeface="Inter" pitchFamily="34" charset="-122"/>
+                <a:cs typeface="Inter" pitchFamily="34" charset="-120"/>
+              </a:rPr>
+              <a:t>DECISÃO ADMINISTRATIVA</a:t>
+            </a:r>
+            <a:endParaRPr lang="en-US" sz="1100" dirty="0"/>
+          </a:p>
+        </p:txBody>
+      </p:sp>
+      <p:sp>
+        <p:nvSpPr>
+          <p:cNvPr id="23" name="importacao-shape-22"/>
           <p:cNvSpPr/>
           <p:nvPr/>
         </p:nvSpPr>
@@ -3390,7 +4026,7 @@
       </p:sp>
       <p:sp>
         <p:nvSpPr>
-          <p:cNvPr id="21" name="importacao-text-20"/>
+          <p:cNvPr id="24" name="importacao-text-23"/>
           <p:cNvSpPr/>
           <p:nvPr/>
         </p:nvSpPr>
@@ -3429,7 +4065,7 @@
       </p:sp>
       <p:sp>
         <p:nvSpPr>
-          <p:cNvPr id="22" name="importacao-text-21"/>
+          <p:cNvPr id="25" name="importacao-text-24"/>
           <p:cNvSpPr/>
           <p:nvPr/>
         </p:nvSpPr>
@@ -3604,6 +4240,65 @@
         </p:nvSpPr>
         <p:spPr>
           <a:xfrm>
+            <a:off x="12725400" y="1727200"/>
+            <a:ext cx="2463800" cy="355600"/>
+          </a:xfrm>
+          <a:prstGeom prst="rect">
+            <a:avLst/>
+          </a:prstGeom>
+          <a:solidFill>
+            <a:srgbClr val="1D5C63"/>
+          </a:solidFill>
+          <a:ln/>
+        </p:spPr>
+      </p:sp>
+      <p:sp>
+        <p:nvSpPr>
+          <p:cNvPr id="6" name="modulos-text-5"/>
+          <p:cNvSpPr/>
+          <p:nvPr/>
+        </p:nvSpPr>
+        <p:spPr>
+          <a:xfrm>
+            <a:off x="12852400" y="1828800"/>
+            <a:ext cx="2209800" cy="152400"/>
+          </a:xfrm>
+          <a:prstGeom prst="rect">
+            <a:avLst/>
+          </a:prstGeom>
+          <a:noFill/>
+          <a:ln/>
+        </p:spPr>
+        <p:txBody>
+          <a:bodyPr wrap="none" lIns="0" tIns="0" rIns="0" bIns="0" rtlCol="0" anchor="t"/>
+          <a:lstStyle/>
+          <a:p>
+            <a:pPr algn="ctr" indent="0" marL="0">
+              <a:buNone/>
+            </a:pPr>
+            <a:r>
+              <a:rPr lang="en-US" altLang="en-US" sz="1100" dirty="0">
+                <a:solidFill>
+                  <a:srgbClr val="F9F7F1"/>
+                </a:solidFill>
+                <a:latin typeface="Inter" pitchFamily="34" charset="0"/>
+                <a:ea typeface="Inter" pitchFamily="34" charset="-122"/>
+                <a:cs typeface="Inter" pitchFamily="34" charset="-120"/>
+              </a:rPr>
+              <a:t>NÚCLEO COMUM PRIMEIRO</a:t>
+            </a:r>
+            <a:endParaRPr lang="en-US" sz="1100" dirty="0"/>
+          </a:p>
+        </p:txBody>
+      </p:sp>
+      <p:sp>
+        <p:nvSpPr>
+          <p:cNvPr id="7" name="modulos-shape-6"/>
+          <p:cNvSpPr/>
+          <p:nvPr/>
+        </p:nvSpPr>
+        <p:spPr>
+          <a:xfrm>
             <a:off x="1066800" y="2997200"/>
             <a:ext cx="4318000" cy="1498600"/>
           </a:xfrm>
@@ -3618,7 +4313,7 @@
       </p:sp>
       <p:pic>
         <p:nvPicPr>
-          <p:cNvPr id="6" name="modulos-icon-5" descr="preencoded.png">    </p:cNvPr>
+          <p:cNvPr id="8" name="modulos-icon-7" descr="preencoded.png">    </p:cNvPr>
           <p:cNvPicPr>
             <a:picLocks noChangeAspect="1"/>
           </p:cNvPicPr>
@@ -3642,7 +4337,7 @@
       </p:pic>
       <p:sp>
         <p:nvSpPr>
-          <p:cNvPr id="7" name="modulos-text-6"/>
+          <p:cNvPr id="9" name="modulos-text-8"/>
           <p:cNvSpPr/>
           <p:nvPr/>
         </p:nvSpPr>
@@ -3698,7 +4393,7 @@
       </p:sp>
       <p:sp>
         <p:nvSpPr>
-          <p:cNvPr id="8" name="modulos-shape-7"/>
+          <p:cNvPr id="10" name="modulos-shape-9"/>
           <p:cNvSpPr/>
           <p:nvPr/>
         </p:nvSpPr>
@@ -3723,7 +4418,7 @@
       </p:sp>
       <p:pic>
         <p:nvPicPr>
-          <p:cNvPr id="9" name="modulos-icon-8" descr="preencoded.png">    </p:cNvPr>
+          <p:cNvPr id="11" name="modulos-icon-10" descr="preencoded.png">    </p:cNvPr>
           <p:cNvPicPr>
             <a:picLocks noChangeAspect="1"/>
           </p:cNvPicPr>
@@ -3747,7 +4442,7 @@
       </p:pic>
       <p:sp>
         <p:nvSpPr>
-          <p:cNvPr id="10" name="modulos-text-9"/>
+          <p:cNvPr id="12" name="modulos-text-11"/>
           <p:cNvSpPr/>
           <p:nvPr/>
         </p:nvSpPr>
@@ -3803,7 +4498,7 @@
       </p:sp>
       <p:sp>
         <p:nvSpPr>
-          <p:cNvPr id="11" name="modulos-shape-10"/>
+          <p:cNvPr id="13" name="modulos-shape-12"/>
           <p:cNvSpPr/>
           <p:nvPr/>
         </p:nvSpPr>
@@ -3828,7 +4523,7 @@
       </p:sp>
       <p:pic>
         <p:nvPicPr>
-          <p:cNvPr id="12" name="modulos-icon-11" descr="preencoded.png">    </p:cNvPr>
+          <p:cNvPr id="14" name="modulos-icon-13" descr="preencoded.png">    </p:cNvPr>
           <p:cNvPicPr>
             <a:picLocks noChangeAspect="1"/>
           </p:cNvPicPr>
@@ -3852,7 +4547,7 @@
       </p:pic>
       <p:sp>
         <p:nvSpPr>
-          <p:cNvPr id="13" name="modulos-text-12"/>
+          <p:cNvPr id="15" name="modulos-text-14"/>
           <p:cNvSpPr/>
           <p:nvPr/>
         </p:nvSpPr>
@@ -3908,7 +4603,7 @@
       </p:sp>
       <p:sp>
         <p:nvSpPr>
-          <p:cNvPr id="14" name="modulos-shape-13"/>
+          <p:cNvPr id="16" name="modulos-shape-15"/>
           <p:cNvSpPr/>
           <p:nvPr/>
         </p:nvSpPr>
@@ -3933,7 +4628,7 @@
       </p:sp>
       <p:pic>
         <p:nvPicPr>
-          <p:cNvPr id="15" name="modulos-icon-14" descr="preencoded.png">    </p:cNvPr>
+          <p:cNvPr id="17" name="modulos-icon-16" descr="preencoded.png">    </p:cNvPr>
           <p:cNvPicPr>
             <a:picLocks noChangeAspect="1"/>
           </p:cNvPicPr>
@@ -3957,7 +4652,7 @@
       </p:pic>
       <p:sp>
         <p:nvSpPr>
-          <p:cNvPr id="16" name="modulos-text-15"/>
+          <p:cNvPr id="18" name="modulos-text-17"/>
           <p:cNvSpPr/>
           <p:nvPr/>
         </p:nvSpPr>
@@ -4013,7 +4708,7 @@
       </p:sp>
       <p:sp>
         <p:nvSpPr>
-          <p:cNvPr id="17" name="modulos-shape-16"/>
+          <p:cNvPr id="19" name="modulos-shape-18"/>
           <p:cNvSpPr/>
           <p:nvPr/>
         </p:nvSpPr>
@@ -4038,7 +4733,7 @@
       </p:sp>
       <p:pic>
         <p:nvPicPr>
-          <p:cNvPr id="18" name="modulos-icon-17" descr="preencoded.png">    </p:cNvPr>
+          <p:cNvPr id="20" name="modulos-icon-19" descr="preencoded.png">    </p:cNvPr>
           <p:cNvPicPr>
             <a:picLocks noChangeAspect="1"/>
           </p:cNvPicPr>
@@ -4062,7 +4757,7 @@
       </p:pic>
       <p:sp>
         <p:nvSpPr>
-          <p:cNvPr id="19" name="modulos-text-18"/>
+          <p:cNvPr id="21" name="modulos-text-20"/>
           <p:cNvSpPr/>
           <p:nvPr/>
         </p:nvSpPr>
@@ -4118,7 +4813,7 @@
       </p:sp>
       <p:sp>
         <p:nvSpPr>
-          <p:cNvPr id="20" name="modulos-shape-19"/>
+          <p:cNvPr id="22" name="modulos-shape-21"/>
           <p:cNvSpPr/>
           <p:nvPr/>
         </p:nvSpPr>
@@ -4143,7 +4838,7 @@
       </p:sp>
       <p:pic>
         <p:nvPicPr>
-          <p:cNvPr id="21" name="modulos-icon-20" descr="preencoded.png">    </p:cNvPr>
+          <p:cNvPr id="23" name="modulos-icon-22" descr="preencoded.png">    </p:cNvPr>
           <p:cNvPicPr>
             <a:picLocks noChangeAspect="1"/>
           </p:cNvPicPr>
@@ -4167,7 +4862,7 @@
       </p:pic>
       <p:sp>
         <p:nvSpPr>
-          <p:cNvPr id="22" name="modulos-text-21"/>
+          <p:cNvPr id="24" name="modulos-text-23"/>
           <p:cNvSpPr/>
           <p:nvPr/>
         </p:nvSpPr>
@@ -4223,7 +4918,68 @@
       </p:sp>
       <p:sp>
         <p:nvSpPr>
-          <p:cNvPr id="23" name="modulos-text-22"/>
+          <p:cNvPr id="25" name="modulos-shape-24"/>
+          <p:cNvSpPr/>
+          <p:nvPr/>
+        </p:nvSpPr>
+        <p:spPr>
+          <a:xfrm>
+            <a:off x="1066800" y="7162800"/>
+            <a:ext cx="14122400" cy="9144"/>
+          </a:xfrm>
+          <a:prstGeom prst="line">
+            <a:avLst/>
+          </a:prstGeom>
+          <a:ln w="25400">
+            <a:solidFill>
+              <a:srgbClr val="1D5C63"/>
+            </a:solidFill>
+            <a:prstDash val="solid"/>
+          </a:ln>
+        </p:spPr>
+      </p:sp>
+      <p:sp>
+        <p:nvSpPr>
+          <p:cNvPr id="26" name="modulos-text-25"/>
+          <p:cNvSpPr/>
+          <p:nvPr/>
+        </p:nvSpPr>
+        <p:spPr>
+          <a:xfrm>
+            <a:off x="1066800" y="7366000"/>
+            <a:ext cx="14122400" cy="228600"/>
+          </a:xfrm>
+          <a:prstGeom prst="rect">
+            <a:avLst/>
+          </a:prstGeom>
+          <a:noFill/>
+          <a:ln/>
+        </p:spPr>
+        <p:txBody>
+          <a:bodyPr wrap="square" lIns="0" tIns="0" rIns="0" bIns="0" rtlCol="0" anchor="t"/>
+          <a:lstStyle/>
+          <a:p>
+            <a:pPr algn="ctr" indent="0" marL="0">
+              <a:buNone/>
+            </a:pPr>
+            <a:r>
+              <a:rPr lang="en-US" altLang="en-US" sz="1200" dirty="0">
+                <a:solidFill>
+                  <a:srgbClr val="76746D"/>
+                </a:solidFill>
+                <a:latin typeface="Inter" pitchFamily="34" charset="0"/>
+                <a:ea typeface="Inter" pitchFamily="34" charset="-122"/>
+                <a:cs typeface="Inter" pitchFamily="34" charset="-120"/>
+              </a:rPr>
+              <a:t>CONFIGURAÇÃO PARA NOVAS UNIDADES · EXTENSÕES CONTROLADAS PARA NOVAS ATIVIDADES · MÓDULOS PARA NOVOS DOMÍNIOS</a:t>
+            </a:r>
+            <a:endParaRPr lang="en-US" sz="1200" dirty="0"/>
+          </a:p>
+        </p:txBody>
+      </p:sp>
+      <p:sp>
+        <p:nvSpPr>
+          <p:cNvPr id="27" name="modulos-text-26"/>
           <p:cNvSpPr/>
           <p:nvPr/>
         </p:nvSpPr>
@@ -4415,7 +5171,46 @@
       </p:sp>
       <p:sp>
         <p:nvSpPr>
-          <p:cNvPr id="5" name="resultado-shape-4"/>
+          <p:cNvPr id="5" name="resultado-text-4"/>
+          <p:cNvSpPr/>
+          <p:nvPr/>
+        </p:nvSpPr>
+        <p:spPr>
+          <a:xfrm>
+            <a:off x="1371600" y="4343400"/>
+            <a:ext cx="5461000" cy="254000"/>
+          </a:xfrm>
+          <a:prstGeom prst="rect">
+            <a:avLst/>
+          </a:prstGeom>
+          <a:noFill/>
+          <a:ln/>
+        </p:spPr>
+        <p:txBody>
+          <a:bodyPr wrap="none" lIns="0" tIns="0" rIns="0" bIns="0" rtlCol="0" anchor="t"/>
+          <a:lstStyle/>
+          <a:p>
+            <a:pPr algn="l" indent="0" marL="0">
+              <a:buNone/>
+            </a:pPr>
+            <a:r>
+              <a:rPr lang="en-US" altLang="en-US" sz="1300" dirty="0">
+                <a:solidFill>
+                  <a:srgbClr val="F9F7F1"/>
+                </a:solidFill>
+                <a:latin typeface="Inter" pitchFamily="34" charset="0"/>
+                <a:ea typeface="Inter" pitchFamily="34" charset="-122"/>
+                <a:cs typeface="Inter" pitchFamily="34" charset="-120"/>
+              </a:rPr>
+              <a:t>UM PLANO DE PARTIDA EM TRÊS MOVIMENTOS</a:t>
+            </a:r>
+            <a:endParaRPr lang="en-US" sz="1300" dirty="0"/>
+          </a:p>
+        </p:txBody>
+      </p:sp>
+      <p:sp>
+        <p:nvSpPr>
+          <p:cNvPr id="6" name="resultado-shape-5"/>
           <p:cNvSpPr/>
           <p:nvPr/>
         </p:nvSpPr>
@@ -4444,7 +5239,46 @@
       </p:sp>
       <p:sp>
         <p:nvSpPr>
-          <p:cNvPr id="6" name="resultado-text-5"/>
+          <p:cNvPr id="7" name="resultado-text-6"/>
+          <p:cNvSpPr/>
+          <p:nvPr/>
+        </p:nvSpPr>
+        <p:spPr>
+          <a:xfrm>
+            <a:off x="4445000" y="5359400"/>
+            <a:ext cx="406400" cy="203200"/>
+          </a:xfrm>
+          <a:prstGeom prst="rect">
+            <a:avLst/>
+          </a:prstGeom>
+          <a:noFill/>
+          <a:ln/>
+        </p:spPr>
+        <p:txBody>
+          <a:bodyPr wrap="none" lIns="0" tIns="0" rIns="0" bIns="0" rtlCol="0" anchor="t"/>
+          <a:lstStyle/>
+          <a:p>
+            <a:pPr algn="r" indent="0" marL="0">
+              <a:buNone/>
+            </a:pPr>
+            <a:r>
+              <a:rPr lang="en-US" altLang="en-US" sz="1300" dirty="0">
+                <a:solidFill>
+                  <a:srgbClr val="F9F7F1"/>
+                </a:solidFill>
+                <a:latin typeface="Inter" pitchFamily="34" charset="0"/>
+                <a:ea typeface="Inter" pitchFamily="34" charset="-122"/>
+                <a:cs typeface="Inter" pitchFamily="34" charset="-120"/>
+              </a:rPr>
+              <a:t>01</a:t>
+            </a:r>
+            <a:endParaRPr lang="en-US" sz="1300" dirty="0"/>
+          </a:p>
+        </p:txBody>
+      </p:sp>
+      <p:sp>
+        <p:nvSpPr>
+          <p:cNvPr id="8" name="resultado-text-7"/>
           <p:cNvSpPr/>
           <p:nvPr/>
         </p:nvSpPr>
@@ -4500,7 +5334,7 @@
       </p:sp>
       <p:sp>
         <p:nvSpPr>
-          <p:cNvPr id="7" name="resultado-shape-6"/>
+          <p:cNvPr id="9" name="resultado-shape-8"/>
           <p:cNvSpPr/>
           <p:nvPr/>
         </p:nvSpPr>
@@ -4529,7 +5363,46 @@
       </p:sp>
       <p:sp>
         <p:nvSpPr>
-          <p:cNvPr id="8" name="resultado-text-7"/>
+          <p:cNvPr id="10" name="resultado-text-9"/>
+          <p:cNvSpPr/>
+          <p:nvPr/>
+        </p:nvSpPr>
+        <p:spPr>
+          <a:xfrm>
+            <a:off x="8839200" y="5359400"/>
+            <a:ext cx="406400" cy="203200"/>
+          </a:xfrm>
+          <a:prstGeom prst="rect">
+            <a:avLst/>
+          </a:prstGeom>
+          <a:noFill/>
+          <a:ln/>
+        </p:spPr>
+        <p:txBody>
+          <a:bodyPr wrap="none" lIns="0" tIns="0" rIns="0" bIns="0" rtlCol="0" anchor="t"/>
+          <a:lstStyle/>
+          <a:p>
+            <a:pPr algn="r" indent="0" marL="0">
+              <a:buNone/>
+            </a:pPr>
+            <a:r>
+              <a:rPr lang="en-US" altLang="en-US" sz="1300" dirty="0">
+                <a:solidFill>
+                  <a:srgbClr val="F9F7F1"/>
+                </a:solidFill>
+                <a:latin typeface="Inter" pitchFamily="34" charset="0"/>
+                <a:ea typeface="Inter" pitchFamily="34" charset="-122"/>
+                <a:cs typeface="Inter" pitchFamily="34" charset="-120"/>
+              </a:rPr>
+              <a:t>02</a:t>
+            </a:r>
+            <a:endParaRPr lang="en-US" sz="1300" dirty="0"/>
+          </a:p>
+        </p:txBody>
+      </p:sp>
+      <p:sp>
+        <p:nvSpPr>
+          <p:cNvPr id="11" name="resultado-text-10"/>
           <p:cNvSpPr/>
           <p:nvPr/>
         </p:nvSpPr>
@@ -4585,7 +5458,7 @@
       </p:sp>
       <p:sp>
         <p:nvSpPr>
-          <p:cNvPr id="9" name="resultado-shape-8"/>
+          <p:cNvPr id="12" name="resultado-shape-11"/>
           <p:cNvSpPr/>
           <p:nvPr/>
         </p:nvSpPr>
@@ -4614,7 +5487,46 @@
       </p:sp>
       <p:sp>
         <p:nvSpPr>
-          <p:cNvPr id="10" name="resultado-text-9"/>
+          <p:cNvPr id="13" name="resultado-text-12"/>
+          <p:cNvSpPr/>
+          <p:nvPr/>
+        </p:nvSpPr>
+        <p:spPr>
+          <a:xfrm>
+            <a:off x="13233400" y="5359400"/>
+            <a:ext cx="406400" cy="203200"/>
+          </a:xfrm>
+          <a:prstGeom prst="rect">
+            <a:avLst/>
+          </a:prstGeom>
+          <a:noFill/>
+          <a:ln/>
+        </p:spPr>
+        <p:txBody>
+          <a:bodyPr wrap="none" lIns="0" tIns="0" rIns="0" bIns="0" rtlCol="0" anchor="t"/>
+          <a:lstStyle/>
+          <a:p>
+            <a:pPr algn="r" indent="0" marL="0">
+              <a:buNone/>
+            </a:pPr>
+            <a:r>
+              <a:rPr lang="en-US" altLang="en-US" sz="1300" dirty="0">
+                <a:solidFill>
+                  <a:srgbClr val="F9F7F1"/>
+                </a:solidFill>
+                <a:latin typeface="Inter" pitchFamily="34" charset="0"/>
+                <a:ea typeface="Inter" pitchFamily="34" charset="-122"/>
+                <a:cs typeface="Inter" pitchFamily="34" charset="-120"/>
+              </a:rPr>
+              <a:t>03</a:t>
+            </a:r>
+            <a:endParaRPr lang="en-US" sz="1300" dirty="0"/>
+          </a:p>
+        </p:txBody>
+      </p:sp>
+      <p:sp>
+        <p:nvSpPr>
+          <p:cNvPr id="14" name="resultado-text-13"/>
           <p:cNvSpPr/>
           <p:nvPr/>
         </p:nvSpPr>
@@ -4670,7 +5582,7 @@
       </p:sp>
       <p:sp>
         <p:nvSpPr>
-          <p:cNvPr id="11" name="resultado-text-10"/>
+          <p:cNvPr id="15" name="resultado-text-14"/>
           <p:cNvSpPr/>
           <p:nvPr/>
         </p:nvSpPr>
@@ -4709,7 +5621,66 @@
       </p:sp>
       <p:sp>
         <p:nvSpPr>
-          <p:cNvPr id="12" name="resultado-text-11"/>
+          <p:cNvPr id="16" name="resultado-shape-15"/>
+          <p:cNvSpPr/>
+          <p:nvPr/>
+        </p:nvSpPr>
+        <p:spPr>
+          <a:xfrm>
+            <a:off x="12369800" y="7518400"/>
+            <a:ext cx="2209800" cy="558800"/>
+          </a:xfrm>
+          <a:prstGeom prst="rect">
+            <a:avLst/>
+          </a:prstGeom>
+          <a:solidFill>
+            <a:srgbClr val="C05746"/>
+          </a:solidFill>
+          <a:ln/>
+        </p:spPr>
+      </p:sp>
+      <p:sp>
+        <p:nvSpPr>
+          <p:cNvPr id="17" name="resultado-text-16"/>
+          <p:cNvSpPr/>
+          <p:nvPr/>
+        </p:nvSpPr>
+        <p:spPr>
+          <a:xfrm>
+            <a:off x="12522200" y="7708900"/>
+            <a:ext cx="1905000" cy="177800"/>
+          </a:xfrm>
+          <a:prstGeom prst="rect">
+            <a:avLst/>
+          </a:prstGeom>
+          <a:noFill/>
+          <a:ln/>
+        </p:spPr>
+        <p:txBody>
+          <a:bodyPr wrap="none" lIns="0" tIns="0" rIns="0" bIns="0" rtlCol="0" anchor="t"/>
+          <a:lstStyle/>
+          <a:p>
+            <a:pPr algn="ctr" indent="0" marL="0">
+              <a:buNone/>
+            </a:pPr>
+            <a:r>
+              <a:rPr lang="en-US" altLang="en-US" sz="1200" dirty="0">
+                <a:solidFill>
+                  <a:srgbClr val="F9F7F1"/>
+                </a:solidFill>
+                <a:latin typeface="Inter" pitchFamily="34" charset="0"/>
+                <a:ea typeface="Inter" pitchFamily="34" charset="-122"/>
+                <a:cs typeface="Inter" pitchFamily="34" charset="-120"/>
+              </a:rPr>
+              <a:t>PRÓXIMO PASSO</a:t>
+            </a:r>
+            <a:endParaRPr lang="en-US" sz="1200" dirty="0"/>
+          </a:p>
+        </p:txBody>
+      </p:sp>
+      <p:sp>
+        <p:nvSpPr>
+          <p:cNvPr id="18" name="resultado-text-17"/>
           <p:cNvSpPr/>
           <p:nvPr/>
         </p:nvSpPr>
